--- a/REI-Combinatoria/08b - Fase3_InformeGrupal (pendent de revisió).pptx
+++ b/REI-Combinatoria/08b - Fase3_InformeGrupal (pendent de revisió).pptx
@@ -290,7 +290,7 @@
 <file path=ppt/revisionInfo.xml><?xml version="1.0" encoding="utf-8"?>
 <p1510:revInfo xmlns:a="http://schemas.openxmlformats.org/drawingml/2006/main" xmlns:r="http://schemas.openxmlformats.org/officeDocument/2006/relationships" xmlns:p1510="http://schemas.microsoft.com/office/powerpoint/2015/10/main">
   <p1510:revLst>
-    <p1510:client id="{7C6D53C4-A734-4D7D-8378-8004A93D69CB}" v="22" dt="2025-01-18T14:23:54.109"/>
+    <p1510:client id="{3CE7BBE8-D435-4282-AE27-961E2E907D41}" v="1" dt="2025-10-16T17:20:56.884"/>
   </p1510:revLst>
 </p1510:revInfo>
 </file>
@@ -310,22 +310,6 @@
           <pc:docMk/>
           <pc:sldMk cId="0" sldId="256"/>
         </pc:sldMkLst>
-        <pc:spChg chg="mod">
-          <ac:chgData name="Susana Vásquez" userId="dffc548e-2323-4ffc-a8aa-757e426c1faa" providerId="ADAL" clId="{7C6D53C4-A734-4D7D-8378-8004A93D69CB}" dt="2025-01-18T08:04:41.913" v="829" actId="790"/>
-          <ac:spMkLst>
-            <pc:docMk/>
-            <pc:sldMk cId="0" sldId="256"/>
-            <ac:spMk id="75" creationId="{00000000-0000-0000-0000-000000000000}"/>
-          </ac:spMkLst>
-        </pc:spChg>
-        <pc:spChg chg="mod">
-          <ac:chgData name="Susana Vásquez" userId="dffc548e-2323-4ffc-a8aa-757e426c1faa" providerId="ADAL" clId="{7C6D53C4-A734-4D7D-8378-8004A93D69CB}" dt="2025-01-18T08:04:41.913" v="829" actId="790"/>
-          <ac:spMkLst>
-            <pc:docMk/>
-            <pc:sldMk cId="0" sldId="256"/>
-            <ac:spMk id="77" creationId="{00000000-0000-0000-0000-000000000000}"/>
-          </ac:spMkLst>
-        </pc:spChg>
       </pc:sldChg>
       <pc:sldChg chg="addSp delSp modSp mod">
         <pc:chgData name="Susana Vásquez" userId="dffc548e-2323-4ffc-a8aa-757e426c1faa" providerId="ADAL" clId="{7C6D53C4-A734-4D7D-8378-8004A93D69CB}" dt="2025-01-18T08:33:44.642" v="1583" actId="1076"/>
@@ -333,78 +317,6 @@
           <pc:docMk/>
           <pc:sldMk cId="0" sldId="257"/>
         </pc:sldMkLst>
-        <pc:spChg chg="add del mod">
-          <ac:chgData name="Susana Vásquez" userId="dffc548e-2323-4ffc-a8aa-757e426c1faa" providerId="ADAL" clId="{7C6D53C4-A734-4D7D-8378-8004A93D69CB}" dt="2025-01-18T07:56:29.761" v="175" actId="478"/>
-          <ac:spMkLst>
-            <pc:docMk/>
-            <pc:sldMk cId="0" sldId="257"/>
-            <ac:spMk id="3" creationId="{CEE073A3-7ECD-6540-6224-0F0CE4571F8E}"/>
-          </ac:spMkLst>
-        </pc:spChg>
-        <pc:spChg chg="add mod">
-          <ac:chgData name="Susana Vásquez" userId="dffc548e-2323-4ffc-a8aa-757e426c1faa" providerId="ADAL" clId="{7C6D53C4-A734-4D7D-8378-8004A93D69CB}" dt="2025-01-18T07:56:29.066" v="174"/>
-          <ac:spMkLst>
-            <pc:docMk/>
-            <pc:sldMk cId="0" sldId="257"/>
-            <ac:spMk id="5" creationId="{19BB2ABA-9D19-104A-D37E-6792A24E1029}"/>
-          </ac:spMkLst>
-        </pc:spChg>
-        <pc:spChg chg="add del mod">
-          <ac:chgData name="Susana Vásquez" userId="dffc548e-2323-4ffc-a8aa-757e426c1faa" providerId="ADAL" clId="{7C6D53C4-A734-4D7D-8378-8004A93D69CB}" dt="2025-01-18T07:56:37.329" v="177" actId="478"/>
-          <ac:spMkLst>
-            <pc:docMk/>
-            <pc:sldMk cId="0" sldId="257"/>
-            <ac:spMk id="7" creationId="{3DEF95A7-9E23-A69F-625B-53C0B839CA5A}"/>
-          </ac:spMkLst>
-        </pc:spChg>
-        <pc:spChg chg="add mod">
-          <ac:chgData name="Susana Vásquez" userId="dffc548e-2323-4ffc-a8aa-757e426c1faa" providerId="ADAL" clId="{7C6D53C4-A734-4D7D-8378-8004A93D69CB}" dt="2025-01-18T08:04:41.913" v="829" actId="790"/>
-          <ac:spMkLst>
-            <pc:docMk/>
-            <pc:sldMk cId="0" sldId="257"/>
-            <ac:spMk id="10" creationId="{F36B3DF0-784E-5B60-D48D-E8A811ACA6AC}"/>
-          </ac:spMkLst>
-        </pc:spChg>
-        <pc:spChg chg="add del mod">
-          <ac:chgData name="Susana Vásquez" userId="dffc548e-2323-4ffc-a8aa-757e426c1faa" providerId="ADAL" clId="{7C6D53C4-A734-4D7D-8378-8004A93D69CB}" dt="2025-01-18T07:56:33.326" v="176" actId="478"/>
-          <ac:spMkLst>
-            <pc:docMk/>
-            <pc:sldMk cId="0" sldId="257"/>
-            <ac:spMk id="82" creationId="{00000000-0000-0000-0000-000000000000}"/>
-          </ac:spMkLst>
-        </pc:spChg>
-        <pc:spChg chg="mod">
-          <ac:chgData name="Susana Vásquez" userId="dffc548e-2323-4ffc-a8aa-757e426c1faa" providerId="ADAL" clId="{7C6D53C4-A734-4D7D-8378-8004A93D69CB}" dt="2025-01-18T08:04:41.913" v="829" actId="790"/>
-          <ac:spMkLst>
-            <pc:docMk/>
-            <pc:sldMk cId="0" sldId="257"/>
-            <ac:spMk id="83" creationId="{00000000-0000-0000-0000-000000000000}"/>
-          </ac:spMkLst>
-        </pc:spChg>
-        <pc:graphicFrameChg chg="add mod">
-          <ac:chgData name="Susana Vásquez" userId="dffc548e-2323-4ffc-a8aa-757e426c1faa" providerId="ADAL" clId="{7C6D53C4-A734-4D7D-8378-8004A93D69CB}" dt="2025-01-18T07:56:25.902" v="173"/>
-          <ac:graphicFrameMkLst>
-            <pc:docMk/>
-            <pc:sldMk cId="0" sldId="257"/>
-            <ac:graphicFrameMk id="4" creationId="{367F6590-447E-00FE-68E8-B3C93FE60D66}"/>
-          </ac:graphicFrameMkLst>
-        </pc:graphicFrameChg>
-        <pc:graphicFrameChg chg="add mod modGraphic">
-          <ac:chgData name="Susana Vásquez" userId="dffc548e-2323-4ffc-a8aa-757e426c1faa" providerId="ADAL" clId="{7C6D53C4-A734-4D7D-8378-8004A93D69CB}" dt="2025-01-18T08:33:44.642" v="1583" actId="1076"/>
-          <ac:graphicFrameMkLst>
-            <pc:docMk/>
-            <pc:sldMk cId="0" sldId="257"/>
-            <ac:graphicFrameMk id="8" creationId="{BB35C86F-270B-0E50-0425-47B7F2755A73}"/>
-          </ac:graphicFrameMkLst>
-        </pc:graphicFrameChg>
-        <pc:graphicFrameChg chg="add mod modGraphic">
-          <ac:chgData name="Susana Vásquez" userId="dffc548e-2323-4ffc-a8aa-757e426c1faa" providerId="ADAL" clId="{7C6D53C4-A734-4D7D-8378-8004A93D69CB}" dt="2025-01-18T08:33:42.118" v="1582" actId="20577"/>
-          <ac:graphicFrameMkLst>
-            <pc:docMk/>
-            <pc:sldMk cId="0" sldId="257"/>
-            <ac:graphicFrameMk id="9" creationId="{AF89C356-D1CD-6E82-CCDF-CEEA09F288D1}"/>
-          </ac:graphicFrameMkLst>
-        </pc:graphicFrameChg>
       </pc:sldChg>
       <pc:sldChg chg="addSp delSp modSp mod">
         <pc:chgData name="Susana Vásquez" userId="dffc548e-2323-4ffc-a8aa-757e426c1faa" providerId="ADAL" clId="{7C6D53C4-A734-4D7D-8378-8004A93D69CB}" dt="2025-01-18T14:33:05.270" v="2206"/>
@@ -412,46 +324,6 @@
           <pc:docMk/>
           <pc:sldMk cId="0" sldId="258"/>
         </pc:sldMkLst>
-        <pc:spChg chg="add del mod">
-          <ac:chgData name="Susana Vásquez" userId="dffc548e-2323-4ffc-a8aa-757e426c1faa" providerId="ADAL" clId="{7C6D53C4-A734-4D7D-8378-8004A93D69CB}" dt="2025-01-18T08:10:25.858" v="1238" actId="478"/>
-          <ac:spMkLst>
-            <pc:docMk/>
-            <pc:sldMk cId="0" sldId="258"/>
-            <ac:spMk id="3" creationId="{85F66362-1806-31DC-6116-C911248D8E7D}"/>
-          </ac:spMkLst>
-        </pc:spChg>
-        <pc:spChg chg="add del mod">
-          <ac:chgData name="Susana Vásquez" userId="dffc548e-2323-4ffc-a8aa-757e426c1faa" providerId="ADAL" clId="{7C6D53C4-A734-4D7D-8378-8004A93D69CB}" dt="2025-01-18T08:10:27.010" v="1239" actId="478"/>
-          <ac:spMkLst>
-            <pc:docMk/>
-            <pc:sldMk cId="0" sldId="258"/>
-            <ac:spMk id="4" creationId="{FCEEF390-2A1E-D9E2-EB5A-F615BDAB11F2}"/>
-          </ac:spMkLst>
-        </pc:spChg>
-        <pc:spChg chg="add mod">
-          <ac:chgData name="Susana Vásquez" userId="dffc548e-2323-4ffc-a8aa-757e426c1faa" providerId="ADAL" clId="{7C6D53C4-A734-4D7D-8378-8004A93D69CB}" dt="2025-01-18T08:10:27.699" v="1240"/>
-          <ac:spMkLst>
-            <pc:docMk/>
-            <pc:sldMk cId="0" sldId="258"/>
-            <ac:spMk id="5" creationId="{2B49691F-9A32-BE60-D823-CD318123B1A2}"/>
-          </ac:spMkLst>
-        </pc:spChg>
-        <pc:spChg chg="mod">
-          <ac:chgData name="Susana Vásquez" userId="dffc548e-2323-4ffc-a8aa-757e426c1faa" providerId="ADAL" clId="{7C6D53C4-A734-4D7D-8378-8004A93D69CB}" dt="2025-01-18T14:33:05.270" v="2206"/>
-          <ac:spMkLst>
-            <pc:docMk/>
-            <pc:sldMk cId="0" sldId="258"/>
-            <ac:spMk id="88" creationId="{00000000-0000-0000-0000-000000000000}"/>
-          </ac:spMkLst>
-        </pc:spChg>
-        <pc:spChg chg="del mod">
-          <ac:chgData name="Susana Vásquez" userId="dffc548e-2323-4ffc-a8aa-757e426c1faa" providerId="ADAL" clId="{7C6D53C4-A734-4D7D-8378-8004A93D69CB}" dt="2025-01-18T08:10:23.452" v="1236" actId="478"/>
-          <ac:spMkLst>
-            <pc:docMk/>
-            <pc:sldMk cId="0" sldId="258"/>
-            <ac:spMk id="89" creationId="{00000000-0000-0000-0000-000000000000}"/>
-          </ac:spMkLst>
-        </pc:spChg>
       </pc:sldChg>
       <pc:sldChg chg="modSp del mod">
         <pc:chgData name="Susana Vásquez" userId="dffc548e-2323-4ffc-a8aa-757e426c1faa" providerId="ADAL" clId="{7C6D53C4-A734-4D7D-8378-8004A93D69CB}" dt="2025-01-18T08:06:41.261" v="993" actId="47"/>
@@ -459,22 +331,6 @@
           <pc:docMk/>
           <pc:sldMk cId="0" sldId="259"/>
         </pc:sldMkLst>
-        <pc:spChg chg="mod">
-          <ac:chgData name="Susana Vásquez" userId="dffc548e-2323-4ffc-a8aa-757e426c1faa" providerId="ADAL" clId="{7C6D53C4-A734-4D7D-8378-8004A93D69CB}" dt="2025-01-18T08:04:41.913" v="829" actId="790"/>
-          <ac:spMkLst>
-            <pc:docMk/>
-            <pc:sldMk cId="0" sldId="259"/>
-            <ac:spMk id="94" creationId="{00000000-0000-0000-0000-000000000000}"/>
-          </ac:spMkLst>
-        </pc:spChg>
-        <pc:spChg chg="mod">
-          <ac:chgData name="Susana Vásquez" userId="dffc548e-2323-4ffc-a8aa-757e426c1faa" providerId="ADAL" clId="{7C6D53C4-A734-4D7D-8378-8004A93D69CB}" dt="2025-01-18T08:04:41.913" v="829" actId="790"/>
-          <ac:spMkLst>
-            <pc:docMk/>
-            <pc:sldMk cId="0" sldId="259"/>
-            <ac:spMk id="95" creationId="{00000000-0000-0000-0000-000000000000}"/>
-          </ac:spMkLst>
-        </pc:spChg>
       </pc:sldChg>
       <pc:sldChg chg="addSp delSp modSp add mod">
         <pc:chgData name="Susana Vásquez" userId="dffc548e-2323-4ffc-a8aa-757e426c1faa" providerId="ADAL" clId="{7C6D53C4-A734-4D7D-8378-8004A93D69CB}" dt="2025-01-18T14:25:36.721" v="2180" actId="20577"/>
@@ -482,46 +338,6 @@
           <pc:docMk/>
           <pc:sldMk cId="1679887425" sldId="259"/>
         </pc:sldMkLst>
-        <pc:spChg chg="add del mod">
-          <ac:chgData name="Susana Vásquez" userId="dffc548e-2323-4ffc-a8aa-757e426c1faa" providerId="ADAL" clId="{7C6D53C4-A734-4D7D-8378-8004A93D69CB}" dt="2025-01-18T08:10:32.145" v="1242" actId="478"/>
-          <ac:spMkLst>
-            <pc:docMk/>
-            <pc:sldMk cId="1679887425" sldId="259"/>
-            <ac:spMk id="3" creationId="{6CDCFB4C-0C3A-9C64-283F-3E93642F7173}"/>
-          </ac:spMkLst>
-        </pc:spChg>
-        <pc:spChg chg="add mod">
-          <ac:chgData name="Susana Vásquez" userId="dffc548e-2323-4ffc-a8aa-757e426c1faa" providerId="ADAL" clId="{7C6D53C4-A734-4D7D-8378-8004A93D69CB}" dt="2025-01-18T08:10:32.940" v="1243"/>
-          <ac:spMkLst>
-            <pc:docMk/>
-            <pc:sldMk cId="1679887425" sldId="259"/>
-            <ac:spMk id="4" creationId="{E67EEDC2-BF1D-9F75-4C28-21A608E3205F}"/>
-          </ac:spMkLst>
-        </pc:spChg>
-        <pc:spChg chg="mod">
-          <ac:chgData name="Susana Vásquez" userId="dffc548e-2323-4ffc-a8aa-757e426c1faa" providerId="ADAL" clId="{7C6D53C4-A734-4D7D-8378-8004A93D69CB}" dt="2025-01-18T14:25:12.015" v="2159" actId="6549"/>
-          <ac:spMkLst>
-            <pc:docMk/>
-            <pc:sldMk cId="1679887425" sldId="259"/>
-            <ac:spMk id="88" creationId="{67677395-927A-44FB-242D-F55D4A890FB2}"/>
-          </ac:spMkLst>
-        </pc:spChg>
-        <pc:spChg chg="del">
-          <ac:chgData name="Susana Vásquez" userId="dffc548e-2323-4ffc-a8aa-757e426c1faa" providerId="ADAL" clId="{7C6D53C4-A734-4D7D-8378-8004A93D69CB}" dt="2025-01-18T08:10:31.096" v="1241" actId="478"/>
-          <ac:spMkLst>
-            <pc:docMk/>
-            <pc:sldMk cId="1679887425" sldId="259"/>
-            <ac:spMk id="89" creationId="{AA35798E-28AE-6EED-F80B-C0F636737990}"/>
-          </ac:spMkLst>
-        </pc:spChg>
-        <pc:graphicFrameChg chg="add mod modGraphic">
-          <ac:chgData name="Susana Vásquez" userId="dffc548e-2323-4ffc-a8aa-757e426c1faa" providerId="ADAL" clId="{7C6D53C4-A734-4D7D-8378-8004A93D69CB}" dt="2025-01-18T14:25:36.721" v="2180" actId="20577"/>
-          <ac:graphicFrameMkLst>
-            <pc:docMk/>
-            <pc:sldMk cId="1679887425" sldId="259"/>
-            <ac:graphicFrameMk id="5" creationId="{CF1B21DF-C0E5-6258-F521-27CC84722D4D}"/>
-          </ac:graphicFrameMkLst>
-        </pc:graphicFrameChg>
       </pc:sldChg>
       <pc:sldChg chg="modSp del mod">
         <pc:chgData name="Susana Vásquez" userId="dffc548e-2323-4ffc-a8aa-757e426c1faa" providerId="ADAL" clId="{7C6D53C4-A734-4D7D-8378-8004A93D69CB}" dt="2025-01-18T08:06:41.261" v="993" actId="47"/>
@@ -529,22 +345,6 @@
           <pc:docMk/>
           <pc:sldMk cId="0" sldId="260"/>
         </pc:sldMkLst>
-        <pc:spChg chg="mod">
-          <ac:chgData name="Susana Vásquez" userId="dffc548e-2323-4ffc-a8aa-757e426c1faa" providerId="ADAL" clId="{7C6D53C4-A734-4D7D-8378-8004A93D69CB}" dt="2025-01-18T08:04:41.913" v="829" actId="790"/>
-          <ac:spMkLst>
-            <pc:docMk/>
-            <pc:sldMk cId="0" sldId="260"/>
-            <ac:spMk id="100" creationId="{00000000-0000-0000-0000-000000000000}"/>
-          </ac:spMkLst>
-        </pc:spChg>
-        <pc:spChg chg="mod">
-          <ac:chgData name="Susana Vásquez" userId="dffc548e-2323-4ffc-a8aa-757e426c1faa" providerId="ADAL" clId="{7C6D53C4-A734-4D7D-8378-8004A93D69CB}" dt="2025-01-18T08:04:41.913" v="829" actId="790"/>
-          <ac:spMkLst>
-            <pc:docMk/>
-            <pc:sldMk cId="0" sldId="260"/>
-            <ac:spMk id="101" creationId="{00000000-0000-0000-0000-000000000000}"/>
-          </ac:spMkLst>
-        </pc:spChg>
       </pc:sldChg>
       <pc:sldChg chg="addSp delSp modSp add mod">
         <pc:chgData name="Susana Vásquez" userId="dffc548e-2323-4ffc-a8aa-757e426c1faa" providerId="ADAL" clId="{7C6D53C4-A734-4D7D-8378-8004A93D69CB}" dt="2025-01-18T08:41:29.284" v="1730" actId="14100"/>
@@ -552,54 +352,6 @@
           <pc:docMk/>
           <pc:sldMk cId="1139963010" sldId="260"/>
         </pc:sldMkLst>
-        <pc:spChg chg="add del mod">
-          <ac:chgData name="Susana Vásquez" userId="dffc548e-2323-4ffc-a8aa-757e426c1faa" providerId="ADAL" clId="{7C6D53C4-A734-4D7D-8378-8004A93D69CB}" dt="2025-01-18T08:10:36.034" v="1245" actId="478"/>
-          <ac:spMkLst>
-            <pc:docMk/>
-            <pc:sldMk cId="1139963010" sldId="260"/>
-            <ac:spMk id="3" creationId="{3F7C240F-5F92-D5E3-DE74-265ACB9B0566}"/>
-          </ac:spMkLst>
-        </pc:spChg>
-        <pc:spChg chg="add mod">
-          <ac:chgData name="Susana Vásquez" userId="dffc548e-2323-4ffc-a8aa-757e426c1faa" providerId="ADAL" clId="{7C6D53C4-A734-4D7D-8378-8004A93D69CB}" dt="2025-01-18T08:10:36.800" v="1246"/>
-          <ac:spMkLst>
-            <pc:docMk/>
-            <pc:sldMk cId="1139963010" sldId="260"/>
-            <ac:spMk id="4" creationId="{709AA1A1-99CA-CF15-6FE6-B3339CD8406E}"/>
-          </ac:spMkLst>
-        </pc:spChg>
-        <pc:spChg chg="mod">
-          <ac:chgData name="Susana Vásquez" userId="dffc548e-2323-4ffc-a8aa-757e426c1faa" providerId="ADAL" clId="{7C6D53C4-A734-4D7D-8378-8004A93D69CB}" dt="2025-01-18T08:09:21.249" v="1232" actId="20577"/>
-          <ac:spMkLst>
-            <pc:docMk/>
-            <pc:sldMk cId="1139963010" sldId="260"/>
-            <ac:spMk id="88" creationId="{F17D3A54-A27A-14A5-271C-3ADBAE7ABF73}"/>
-          </ac:spMkLst>
-        </pc:spChg>
-        <pc:spChg chg="del">
-          <ac:chgData name="Susana Vásquez" userId="dffc548e-2323-4ffc-a8aa-757e426c1faa" providerId="ADAL" clId="{7C6D53C4-A734-4D7D-8378-8004A93D69CB}" dt="2025-01-18T08:10:35.361" v="1244" actId="478"/>
-          <ac:spMkLst>
-            <pc:docMk/>
-            <pc:sldMk cId="1139963010" sldId="260"/>
-            <ac:spMk id="89" creationId="{83E89DC1-BF96-5C7E-6D77-D5807FD17B7C}"/>
-          </ac:spMkLst>
-        </pc:spChg>
-        <pc:graphicFrameChg chg="add mod modGraphic">
-          <ac:chgData name="Susana Vásquez" userId="dffc548e-2323-4ffc-a8aa-757e426c1faa" providerId="ADAL" clId="{7C6D53C4-A734-4D7D-8378-8004A93D69CB}" dt="2025-01-18T08:41:27.185" v="1729" actId="1076"/>
-          <ac:graphicFrameMkLst>
-            <pc:docMk/>
-            <pc:sldMk cId="1139963010" sldId="260"/>
-            <ac:graphicFrameMk id="5" creationId="{9EFAECC8-31B7-A2E0-E375-E6571D2BF263}"/>
-          </ac:graphicFrameMkLst>
-        </pc:graphicFrameChg>
-        <pc:graphicFrameChg chg="add mod modGraphic">
-          <ac:chgData name="Susana Vásquez" userId="dffc548e-2323-4ffc-a8aa-757e426c1faa" providerId="ADAL" clId="{7C6D53C4-A734-4D7D-8378-8004A93D69CB}" dt="2025-01-18T08:41:29.284" v="1730" actId="14100"/>
-          <ac:graphicFrameMkLst>
-            <pc:docMk/>
-            <pc:sldMk cId="1139963010" sldId="260"/>
-            <ac:graphicFrameMk id="6" creationId="{CB19A486-E06E-5A8D-B341-F5E17EF0416D}"/>
-          </ac:graphicFrameMkLst>
-        </pc:graphicFrameChg>
       </pc:sldChg>
       <pc:sldChg chg="modSp del mod">
         <pc:chgData name="Susana Vásquez" userId="dffc548e-2323-4ffc-a8aa-757e426c1faa" providerId="ADAL" clId="{7C6D53C4-A734-4D7D-8378-8004A93D69CB}" dt="2025-01-18T08:06:41.261" v="993" actId="47"/>
@@ -607,22 +359,30 @@
           <pc:docMk/>
           <pc:sldMk cId="0" sldId="261"/>
         </pc:sldMkLst>
-        <pc:spChg chg="mod">
-          <ac:chgData name="Susana Vásquez" userId="dffc548e-2323-4ffc-a8aa-757e426c1faa" providerId="ADAL" clId="{7C6D53C4-A734-4D7D-8378-8004A93D69CB}" dt="2025-01-18T08:04:41.913" v="829" actId="790"/>
-          <ac:spMkLst>
+      </pc:sldChg>
+    </pc:docChg>
+  </pc:docChgLst>
+  <pc:docChgLst>
+    <pc:chgData name="Susana Vasquez Elias" userId="e776416f-e583-4d77-b224-146689d50a03" providerId="ADAL" clId="{3C100498-C411-419B-B5E6-C2EF21CD595F}"/>
+    <pc:docChg chg="modSld">
+      <pc:chgData name="Susana Vasquez Elias" userId="e776416f-e583-4d77-b224-146689d50a03" providerId="ADAL" clId="{3C100498-C411-419B-B5E6-C2EF21CD595F}" dt="2025-10-16T17:21:00.382" v="1" actId="1076"/>
+      <pc:docMkLst>
+        <pc:docMk/>
+      </pc:docMkLst>
+      <pc:sldChg chg="addSp modSp mod">
+        <pc:chgData name="Susana Vasquez Elias" userId="e776416f-e583-4d77-b224-146689d50a03" providerId="ADAL" clId="{3C100498-C411-419B-B5E6-C2EF21CD595F}" dt="2025-10-16T17:21:00.382" v="1" actId="1076"/>
+        <pc:sldMkLst>
+          <pc:docMk/>
+          <pc:sldMk cId="0" sldId="256"/>
+        </pc:sldMkLst>
+        <pc:picChg chg="add mod">
+          <ac:chgData name="Susana Vasquez Elias" userId="e776416f-e583-4d77-b224-146689d50a03" providerId="ADAL" clId="{3C100498-C411-419B-B5E6-C2EF21CD595F}" dt="2025-10-16T17:21:00.382" v="1" actId="1076"/>
+          <ac:picMkLst>
             <pc:docMk/>
-            <pc:sldMk cId="0" sldId="261"/>
-            <ac:spMk id="106" creationId="{00000000-0000-0000-0000-000000000000}"/>
-          </ac:spMkLst>
-        </pc:spChg>
-        <pc:spChg chg="mod">
-          <ac:chgData name="Susana Vásquez" userId="dffc548e-2323-4ffc-a8aa-757e426c1faa" providerId="ADAL" clId="{7C6D53C4-A734-4D7D-8378-8004A93D69CB}" dt="2025-01-18T08:04:41.913" v="829" actId="790"/>
-          <ac:spMkLst>
-            <pc:docMk/>
-            <pc:sldMk cId="0" sldId="261"/>
-            <ac:spMk id="107" creationId="{00000000-0000-0000-0000-000000000000}"/>
-          </ac:spMkLst>
-        </pc:spChg>
+            <pc:sldMk cId="0" sldId="256"/>
+            <ac:picMk id="2" creationId="{2ADF4236-C311-988C-1EAF-F33444BF8989}"/>
+          </ac:picMkLst>
+        </pc:picChg>
       </pc:sldChg>
     </pc:docChg>
   </pc:docChgLst>
@@ -7521,6 +7281,52 @@
           </a:p>
         </p:txBody>
       </p:sp>
+      <p:pic>
+        <p:nvPicPr>
+          <p:cNvPr id="2" name="Picture 1" descr="A grey square with white text&#10;&#10;AI-generated content may be incorrect.">
+            <a:extLst>
+              <a:ext uri="{FF2B5EF4-FFF2-40B4-BE49-F238E27FC236}">
+                <a16:creationId xmlns:a16="http://schemas.microsoft.com/office/drawing/2014/main" id="{2ADF4236-C311-988C-1EAF-F33444BF8989}"/>
+              </a:ext>
+            </a:extLst>
+          </p:cNvPr>
+          <p:cNvPicPr>
+            <a:picLocks noChangeAspect="1"/>
+          </p:cNvPicPr>
+          <p:nvPr/>
+        </p:nvPicPr>
+        <p:blipFill rotWithShape="1">
+          <a:blip r:embed="rId4">
+            <a:extLst>
+              <a:ext uri="{28A0092B-C50C-407E-A947-70E740481C1C}">
+                <a14:useLocalDpi xmlns:a14="http://schemas.microsoft.com/office/drawing/2010/main" val="0"/>
+              </a:ext>
+            </a:extLst>
+          </a:blip>
+          <a:srcRect r="18171" b="16231"/>
+          <a:stretch>
+            <a:fillRect/>
+          </a:stretch>
+        </p:blipFill>
+        <p:spPr bwMode="auto">
+          <a:xfrm>
+            <a:off x="6563995" y="5851232"/>
+            <a:ext cx="2092960" cy="556895"/>
+          </a:xfrm>
+          <a:prstGeom prst="rect">
+            <a:avLst/>
+          </a:prstGeom>
+          <a:noFill/>
+          <a:ln>
+            <a:noFill/>
+          </a:ln>
+          <a:extLst>
+            <a:ext uri="{53640926-AAD7-44D8-BBD7-CCE9431645EC}">
+              <a14:shadowObscured xmlns:a14="http://schemas.microsoft.com/office/drawing/2010/main"/>
+            </a:ext>
+          </a:extLst>
+        </p:spPr>
+      </p:pic>
     </p:spTree>
   </p:cSld>
   <p:clrMapOvr>
